--- a/media/resources/files/Onduktar_KoboytuuXO_PeziorO.pptx
+++ b/media/resources/files/Onduktar_KoboytuuXO_PeziorO.pptx
@@ -8348,7 +8348,7 @@
                 <a:ea typeface="+mn-ea"/>
                 <a:cs typeface="+mn-cs"/>
               </a:rPr>
-              <a:t>Турдуу пикирлер учун ыраазычылык билдиребиз.</a:t>
+              <a:t>Түрдүү пикирлер үчүн ыраазычылык билдиребиз.</a:t>
             </a:r>
           </a:p>
           <a:p>

--- a/media/resources/files/Onduktar_KoboytuuXO_PeziorO.pptx
+++ b/media/resources/files/Onduktar_KoboytuuXO_PeziorO.pptx
@@ -3874,7 +3874,7 @@
                 <a:ea typeface="+mn-ea"/>
                 <a:cs typeface="Arial" panose="020B0604020202020204" pitchFamily="34" charset="0"/>
               </a:rPr>
-              <a:t>Мугалим үчүн жооп баракчасы жана таратма материалдар камтылган.</a:t>
+              <a:t>Мугалим үчүн жооп барагы жана таратма материалдар бар.</a:t>
             </a:r>
           </a:p>
           <a:p>
@@ -3943,7 +3943,7 @@
                 <a:ea typeface="+mn-ea"/>
                 <a:cs typeface="Arial" panose="020B0604020202020204" pitchFamily="34" charset="0"/>
               </a:rPr>
-              <a:t>Кайсы команда туура жооп бергенине жараша '</a:t>
+              <a:t>Туура жооп берген командага жараша «</a:t>
             </a:r>
             <a:r>
               <a:rPr kumimoji="0" lang="en-GB" sz="2000" b="0" i="0" u="sng" strike="noStrike" kern="1200" cap="none" spc="0" normalizeH="0" baseline="0" noProof="0" dirty="0">
@@ -3960,7 +3960,7 @@
                 <a:ea typeface="+mn-ea"/>
                 <a:cs typeface="Arial" panose="020B0604020202020204" pitchFamily="34" charset="0"/>
               </a:rPr>
-              <a:t>X' </a:t>
+              <a:t>X» </a:t>
             </a:r>
             <a:r>
               <a:rPr kumimoji="0" lang="ru-RU" sz="2000" b="0" i="0" u="sng" strike="noStrike" kern="1200" cap="none" spc="0" normalizeH="0" baseline="0" noProof="0" dirty="0">
@@ -3977,7 +3977,7 @@
                 <a:ea typeface="+mn-ea"/>
                 <a:cs typeface="Arial" panose="020B0604020202020204" pitchFamily="34" charset="0"/>
               </a:rPr>
-              <a:t>же '</a:t>
+              <a:t>же «</a:t>
             </a:r>
             <a:r>
               <a:rPr kumimoji="0" lang="en-GB" sz="2000" b="0" i="0" u="sng" strike="noStrike" kern="1200" cap="none" spc="0" normalizeH="0" baseline="0" noProof="0" dirty="0">
@@ -3994,7 +3994,7 @@
                 <a:ea typeface="+mn-ea"/>
                 <a:cs typeface="Arial" panose="020B0604020202020204" pitchFamily="34" charset="0"/>
               </a:rPr>
-              <a:t>O' </a:t>
+              <a:t>O» </a:t>
             </a:r>
             <a:r>
               <a:rPr kumimoji="0" lang="ru-RU" sz="2000" b="0" i="0" u="sng" strike="noStrike" kern="1200" cap="none" spc="0" normalizeH="0" baseline="0" noProof="0" dirty="0">
@@ -4011,7 +4011,7 @@
                 <a:ea typeface="+mn-ea"/>
                 <a:cs typeface="Arial" panose="020B0604020202020204" pitchFamily="34" charset="0"/>
               </a:rPr>
-              <a:t>баскычын басыңыз/тийип коюңуз</a:t>
+              <a:t>баскычын басыңыз</a:t>
             </a:r>
             <a:r>
               <a:rPr kumimoji="0" lang="en-GB" sz="2000" b="0" i="0" u="none" strike="noStrike" kern="1200" cap="none" spc="0" normalizeH="0" baseline="0" noProof="0" dirty="0">
@@ -4537,7 +4537,7 @@
             <a:pPr algn="ctr"/>
             <a:r>
               <a:rPr lang="en-GB" sz="4400" dirty="0"/>
-              <a:t>4 × 1.1</a:t>
+              <a:t>4 × 1,1</a:t>
             </a:r>
           </a:p>
         </p:txBody>
@@ -4578,7 +4578,7 @@
             <a:pPr algn="ctr"/>
             <a:r>
               <a:rPr lang="en-GB" sz="4400" dirty="0"/>
-              <a:t>1.2 × 0.6</a:t>
+              <a:t>1,2 × 0,6</a:t>
             </a:r>
           </a:p>
         </p:txBody>
@@ -4619,7 +4619,7 @@
             <a:pPr algn="ctr"/>
             <a:r>
               <a:rPr lang="en-GB" sz="4400" dirty="0"/>
-              <a:t>7 × 2.1</a:t>
+              <a:t>7 × 2,1</a:t>
             </a:r>
           </a:p>
         </p:txBody>
@@ -4660,7 +4660,7 @@
             <a:pPr algn="ctr"/>
             <a:r>
               <a:rPr lang="en-GB" sz="4400" dirty="0"/>
-              <a:t>0.4 × 0.8</a:t>
+              <a:t>0,4 × 0,8</a:t>
             </a:r>
           </a:p>
         </p:txBody>
@@ -4701,7 +4701,7 @@
             <a:pPr algn="ctr"/>
             <a:r>
               <a:rPr lang="en-GB" sz="4400" dirty="0"/>
-              <a:t>2.1 × 1.6</a:t>
+              <a:t>2,1 × 1,6</a:t>
             </a:r>
           </a:p>
         </p:txBody>
@@ -4742,7 +4742,7 @@
             <a:pPr algn="ctr"/>
             <a:r>
               <a:rPr lang="en-GB" sz="4400" dirty="0"/>
-              <a:t>0.9 × 0.7</a:t>
+              <a:t>0,9 × 0,7</a:t>
             </a:r>
           </a:p>
         </p:txBody>
@@ -4783,7 +4783,7 @@
             <a:pPr algn="ctr"/>
             <a:r>
               <a:rPr lang="en-GB" sz="4400" dirty="0"/>
-              <a:t>3.7 × 3</a:t>
+              <a:t>3,7 × 3</a:t>
             </a:r>
           </a:p>
         </p:txBody>
@@ -4824,7 +4824,7 @@
             <a:pPr algn="ctr"/>
             <a:r>
               <a:rPr lang="en-GB" sz="4400" dirty="0"/>
-              <a:t>0.4 × 1.7</a:t>
+              <a:t>0,4 × 1,7</a:t>
             </a:r>
           </a:p>
         </p:txBody>
@@ -4865,7 +4865,7 @@
             <a:pPr algn="ctr"/>
             <a:r>
               <a:rPr lang="en-GB" sz="4400" dirty="0"/>
-              <a:t>1.6 × 3</a:t>
+              <a:t>1,6 × 3</a:t>
             </a:r>
           </a:p>
         </p:txBody>
